--- a/documents/명함제작/[2026 우리가치(WeValue) QI 활동 프로젝트 명함2(뒤).pptx
+++ b/documents/명함제작/[2026 우리가치(WeValue) QI 활동 프로젝트 명함2(뒤).pptx
@@ -2,7 +2,7 @@
 <file path=ppt/presentation.xml><?xml version="1.0" encoding="utf-8"?>
 <p:presentation xmlns:a="http://schemas.openxmlformats.org/drawingml/2006/main" xmlns:r="http://schemas.openxmlformats.org/officeDocument/2006/relationships" xmlns:p="http://schemas.openxmlformats.org/presentationml/2006/main" saveSubsetFonts="1">
   <p:sldMasterIdLst>
-    <p:sldMasterId id="2147483870" r:id="rId1"/>
+    <p:sldMasterId id="2147483883" r:id="rId1"/>
   </p:sldMasterIdLst>
   <p:notesMasterIdLst>
     <p:notesMasterId r:id="rId8"/>
@@ -15,7 +15,7 @@
     <p:sldId id="304" r:id="rId6"/>
     <p:sldId id="305" r:id="rId7"/>
   </p:sldIdLst>
-  <p:sldSz cx="3240088" cy="1800225"/>
+  <p:sldSz cx="3200400" cy="1800225"/>
   <p:notesSz cx="6858000" cy="9945688"/>
   <p:defaultTextStyle>
     <a:defPPr>
@@ -130,17 +130,17 @@
             <a:srgbClr val="A4A3A4"/>
           </p15:clr>
         </p15:guide>
-        <p15:guide id="8" pos="1021" userDrawn="1">
+        <p15:guide id="8" pos="1008" userDrawn="1">
           <p15:clr>
             <a:srgbClr val="A4A3A4"/>
           </p15:clr>
         </p15:guide>
-        <p15:guide id="9" pos="132" userDrawn="1">
+        <p15:guide id="9" pos="130" userDrawn="1">
           <p15:clr>
             <a:srgbClr val="A4A3A4"/>
           </p15:clr>
         </p15:guide>
-        <p15:guide id="10" pos="1909" userDrawn="1">
+        <p15:guide id="10" pos="1886" userDrawn="1">
           <p15:clr>
             <a:srgbClr val="A4A3A4"/>
           </p15:clr>
@@ -233,7 +233,7 @@
           <a:p>
             <a:fld id="{F929F65E-AEE7-45C5-814B-4468CAF1E537}" type="datetimeFigureOut">
               <a:rPr lang="ko-KR" altLang="en-US" smtClean="0"/>
-              <a:t>2026-03-08</a:t>
+              <a:t>2026-04-09</a:t>
             </a:fld>
             <a:endParaRPr lang="ko-KR" altLang="en-US"/>
           </a:p>
@@ -251,8 +251,8 @@
         </p:nvSpPr>
         <p:spPr>
           <a:xfrm>
-            <a:off x="406400" y="1241425"/>
-            <a:ext cx="6045200" cy="3359150"/>
+            <a:off x="442913" y="1241425"/>
+            <a:ext cx="5972175" cy="3359150"/>
           </a:xfrm>
           <a:prstGeom prst="rect">
             <a:avLst/>
@@ -529,8 +529,8 @@
         </p:nvSpPr>
         <p:spPr>
           <a:xfrm>
-            <a:off x="405011" y="294620"/>
-            <a:ext cx="2430066" cy="626745"/>
+            <a:off x="400050" y="294620"/>
+            <a:ext cx="2400300" cy="626745"/>
           </a:xfrm>
         </p:spPr>
         <p:txBody>
@@ -561,8 +561,8 @@
         </p:nvSpPr>
         <p:spPr>
           <a:xfrm>
-            <a:off x="405011" y="945535"/>
-            <a:ext cx="2430066" cy="434638"/>
+            <a:off x="400050" y="945535"/>
+            <a:ext cx="2400300" cy="434638"/>
           </a:xfrm>
         </p:spPr>
         <p:txBody>
@@ -631,7 +631,7 @@
           <a:p>
             <a:fld id="{149F34B4-7175-41BD-B98B-2E7021201D7D}" type="datetimeFigureOut">
               <a:rPr lang="ko-KR" altLang="en-US" smtClean="0"/>
-              <a:t>2026-03-08</a:t>
+              <a:t>2026-04-09</a:t>
             </a:fld>
             <a:endParaRPr lang="ko-KR" altLang="en-US"/>
           </a:p>
@@ -682,7 +682,7 @@
     </p:spTree>
     <p:extLst>
       <p:ext uri="{BB962C8B-B14F-4D97-AF65-F5344CB8AC3E}">
-        <p14:creationId xmlns:p14="http://schemas.microsoft.com/office/powerpoint/2010/main" val="3453375835"/>
+        <p14:creationId xmlns:p14="http://schemas.microsoft.com/office/powerpoint/2010/main" val="2796508916"/>
       </p:ext>
     </p:extLst>
   </p:cSld>
@@ -801,7 +801,7 @@
           <a:p>
             <a:fld id="{149F34B4-7175-41BD-B98B-2E7021201D7D}" type="datetimeFigureOut">
               <a:rPr lang="ko-KR" altLang="en-US" smtClean="0"/>
-              <a:t>2026-03-08</a:t>
+              <a:t>2026-04-09</a:t>
             </a:fld>
             <a:endParaRPr lang="ko-KR" altLang="en-US"/>
           </a:p>
@@ -852,7 +852,7 @@
     </p:spTree>
     <p:extLst>
       <p:ext uri="{BB962C8B-B14F-4D97-AF65-F5344CB8AC3E}">
-        <p14:creationId xmlns:p14="http://schemas.microsoft.com/office/powerpoint/2010/main" val="3250027929"/>
+        <p14:creationId xmlns:p14="http://schemas.microsoft.com/office/powerpoint/2010/main" val="3009660850"/>
       </p:ext>
     </p:extLst>
   </p:cSld>
@@ -891,8 +891,8 @@
         </p:nvSpPr>
         <p:spPr>
           <a:xfrm>
-            <a:off x="2318688" y="95846"/>
-            <a:ext cx="698644" cy="1525607"/>
+            <a:off x="2290286" y="95846"/>
+            <a:ext cx="690086" cy="1525607"/>
           </a:xfrm>
         </p:spPr>
         <p:txBody>
@@ -919,8 +919,8 @@
         </p:nvSpPr>
         <p:spPr>
           <a:xfrm>
-            <a:off x="222756" y="95846"/>
-            <a:ext cx="2055431" cy="1525607"/>
+            <a:off x="220027" y="95846"/>
+            <a:ext cx="2030254" cy="1525607"/>
           </a:xfrm>
         </p:spPr>
         <p:txBody>
@@ -981,7 +981,7 @@
           <a:p>
             <a:fld id="{149F34B4-7175-41BD-B98B-2E7021201D7D}" type="datetimeFigureOut">
               <a:rPr lang="ko-KR" altLang="en-US" smtClean="0"/>
-              <a:t>2026-03-08</a:t>
+              <a:t>2026-04-09</a:t>
             </a:fld>
             <a:endParaRPr lang="ko-KR" altLang="en-US"/>
           </a:p>
@@ -1032,7 +1032,7 @@
     </p:spTree>
     <p:extLst>
       <p:ext uri="{BB962C8B-B14F-4D97-AF65-F5344CB8AC3E}">
-        <p14:creationId xmlns:p14="http://schemas.microsoft.com/office/powerpoint/2010/main" val="3315396022"/>
+        <p14:creationId xmlns:p14="http://schemas.microsoft.com/office/powerpoint/2010/main" val="446236139"/>
       </p:ext>
     </p:extLst>
   </p:cSld>
@@ -1073,8 +1073,8 @@
         </p:nvSpPr>
         <p:spPr>
           <a:xfrm>
-            <a:off x="1" y="0"/>
-            <a:ext cx="3246839" cy="1800225"/>
+            <a:off x="2" y="1"/>
+            <a:ext cx="3207068" cy="1800225"/>
           </a:xfrm>
           <a:prstGeom prst="rect">
             <a:avLst/>
@@ -1127,8 +1127,8 @@
         </p:nvSpPr>
         <p:spPr>
           <a:xfrm>
-            <a:off x="29909" y="30482"/>
-            <a:ext cx="3182265" cy="1728467"/>
+            <a:off x="29543" y="30483"/>
+            <a:ext cx="3143285" cy="1728467"/>
           </a:xfrm>
           <a:prstGeom prst="rect">
             <a:avLst/>
@@ -1187,8 +1187,8 @@
         </p:blipFill>
         <p:spPr>
           <a:xfrm>
-            <a:off x="2790825" y="81588"/>
-            <a:ext cx="363162" cy="203042"/>
+            <a:off x="2756640" y="81588"/>
+            <a:ext cx="358714" cy="203042"/>
           </a:xfrm>
           <a:prstGeom prst="rect">
             <a:avLst/>
@@ -1214,8 +1214,8 @@
         </p:nvSpPr>
         <p:spPr>
           <a:xfrm>
-            <a:off x="2098273" y="1569905"/>
-            <a:ext cx="1141815" cy="169277"/>
+            <a:off x="2072572" y="1569906"/>
+            <a:ext cx="1127829" cy="169277"/>
           </a:xfrm>
           <a:prstGeom prst="rect">
             <a:avLst/>
@@ -1252,7 +1252,7 @@
     </p:spTree>
     <p:extLst>
       <p:ext uri="{BB962C8B-B14F-4D97-AF65-F5344CB8AC3E}">
-        <p14:creationId xmlns:p14="http://schemas.microsoft.com/office/powerpoint/2010/main" val="2744513500"/>
+        <p14:creationId xmlns:p14="http://schemas.microsoft.com/office/powerpoint/2010/main" val="2216141731"/>
       </p:ext>
     </p:extLst>
   </p:cSld>
@@ -1267,7 +1267,7 @@
             <a:srgbClr val="FBAE40"/>
           </p15:clr>
         </p15:guide>
-        <p15:guide id="2" pos="1021">
+        <p15:guide id="2" pos="1008">
           <p15:clr>
             <a:srgbClr val="FBAE40"/>
           </p15:clr>
@@ -1309,8 +1309,8 @@
         </p:nvSpPr>
         <p:spPr>
           <a:xfrm>
-            <a:off x="1" y="0"/>
-            <a:ext cx="3246839" cy="1800225"/>
+            <a:off x="2" y="1"/>
+            <a:ext cx="3207068" cy="1800225"/>
           </a:xfrm>
           <a:prstGeom prst="rect">
             <a:avLst/>
@@ -1363,8 +1363,8 @@
         </p:nvSpPr>
         <p:spPr>
           <a:xfrm>
-            <a:off x="45477" y="17494"/>
-            <a:ext cx="3154111" cy="1764512"/>
+            <a:off x="44921" y="17494"/>
+            <a:ext cx="3115476" cy="1764512"/>
           </a:xfrm>
           <a:prstGeom prst="rect">
             <a:avLst/>
@@ -1423,8 +1423,8 @@
         </p:blipFill>
         <p:spPr>
           <a:xfrm>
-            <a:off x="2829499" y="29235"/>
-            <a:ext cx="324488" cy="75610"/>
+            <a:off x="2794840" y="29235"/>
+            <a:ext cx="320513" cy="75610"/>
           </a:xfrm>
           <a:prstGeom prst="rect">
             <a:avLst/>
@@ -1450,7 +1450,7 @@
         </p:nvSpPr>
         <p:spPr>
           <a:xfrm>
-            <a:off x="2890773" y="1686920"/>
+            <a:off x="2852140" y="1686921"/>
             <a:ext cx="263214" cy="123111"/>
           </a:xfrm>
           <a:prstGeom prst="rect">
@@ -1516,7 +1516,7 @@
             <a:srgbClr val="FBAE40"/>
           </p15:clr>
         </p15:guide>
-        <p15:guide id="2" pos="1021" userDrawn="1">
+        <p15:guide id="2" pos="1008" userDrawn="1">
           <p15:clr>
             <a:srgbClr val="FBAE40"/>
           </p15:clr>
@@ -1558,8 +1558,8 @@
         </p:nvSpPr>
         <p:spPr>
           <a:xfrm>
-            <a:off x="1" y="0"/>
-            <a:ext cx="3246839" cy="1800225"/>
+            <a:off x="2" y="1"/>
+            <a:ext cx="3207068" cy="1800225"/>
           </a:xfrm>
           <a:prstGeom prst="rect">
             <a:avLst/>
@@ -1612,8 +1612,8 @@
         </p:nvSpPr>
         <p:spPr>
           <a:xfrm>
-            <a:off x="45477" y="17494"/>
-            <a:ext cx="3154111" cy="1764512"/>
+            <a:off x="44921" y="17494"/>
+            <a:ext cx="3115476" cy="1764512"/>
           </a:xfrm>
           <a:prstGeom prst="rect">
             <a:avLst/>
@@ -1672,8 +1672,8 @@
         </p:blipFill>
         <p:spPr>
           <a:xfrm>
-            <a:off x="2827923" y="29235"/>
-            <a:ext cx="324488" cy="75610"/>
+            <a:off x="2793284" y="29235"/>
+            <a:ext cx="320513" cy="75610"/>
           </a:xfrm>
           <a:prstGeom prst="rect">
             <a:avLst/>
@@ -1699,8 +1699,8 @@
         </p:nvSpPr>
         <p:spPr>
           <a:xfrm>
-            <a:off x="2863523" y="1707219"/>
-            <a:ext cx="290464" cy="107722"/>
+            <a:off x="2824889" y="1707219"/>
+            <a:ext cx="290465" cy="107722"/>
           </a:xfrm>
           <a:prstGeom prst="rect">
             <a:avLst/>
@@ -1765,7 +1765,7 @@
             <a:srgbClr val="FBAE40"/>
           </p15:clr>
         </p15:guide>
-        <p15:guide id="2" pos="1021" userDrawn="1">
+        <p15:guide id="2" pos="1008" userDrawn="1">
           <p15:clr>
             <a:srgbClr val="FBAE40"/>
           </p15:clr>
@@ -1890,7 +1890,7 @@
           <a:p>
             <a:fld id="{149F34B4-7175-41BD-B98B-2E7021201D7D}" type="datetimeFigureOut">
               <a:rPr lang="ko-KR" altLang="en-US" smtClean="0"/>
-              <a:t>2026-03-08</a:t>
+              <a:t>2026-04-09</a:t>
             </a:fld>
             <a:endParaRPr lang="ko-KR" altLang="en-US"/>
           </a:p>
@@ -1941,7 +1941,7 @@
     </p:spTree>
     <p:extLst>
       <p:ext uri="{BB962C8B-B14F-4D97-AF65-F5344CB8AC3E}">
-        <p14:creationId xmlns:p14="http://schemas.microsoft.com/office/powerpoint/2010/main" val="1634003482"/>
+        <p14:creationId xmlns:p14="http://schemas.microsoft.com/office/powerpoint/2010/main" val="372781465"/>
       </p:ext>
     </p:extLst>
   </p:cSld>
@@ -1980,8 +1980,8 @@
         </p:nvSpPr>
         <p:spPr>
           <a:xfrm>
-            <a:off x="221068" y="448807"/>
-            <a:ext cx="2794576" cy="748843"/>
+            <a:off x="218361" y="448807"/>
+            <a:ext cx="2760345" cy="748843"/>
           </a:xfrm>
         </p:spPr>
         <p:txBody>
@@ -2012,8 +2012,8 @@
         </p:nvSpPr>
         <p:spPr>
           <a:xfrm>
-            <a:off x="221068" y="1204734"/>
-            <a:ext cx="2794576" cy="393799"/>
+            <a:off x="218361" y="1204734"/>
+            <a:ext cx="2760345" cy="393799"/>
           </a:xfrm>
         </p:spPr>
         <p:txBody>
@@ -2136,7 +2136,7 @@
           <a:p>
             <a:fld id="{149F34B4-7175-41BD-B98B-2E7021201D7D}" type="datetimeFigureOut">
               <a:rPr lang="ko-KR" altLang="en-US" smtClean="0"/>
-              <a:t>2026-03-08</a:t>
+              <a:t>2026-04-09</a:t>
             </a:fld>
             <a:endParaRPr lang="ko-KR" altLang="en-US"/>
           </a:p>
@@ -2187,7 +2187,7 @@
     </p:spTree>
     <p:extLst>
       <p:ext uri="{BB962C8B-B14F-4D97-AF65-F5344CB8AC3E}">
-        <p14:creationId xmlns:p14="http://schemas.microsoft.com/office/powerpoint/2010/main" val="3434871378"/>
+        <p14:creationId xmlns:p14="http://schemas.microsoft.com/office/powerpoint/2010/main" val="465922592"/>
       </p:ext>
     </p:extLst>
   </p:cSld>
@@ -2249,8 +2249,8 @@
         </p:nvSpPr>
         <p:spPr>
           <a:xfrm>
-            <a:off x="222756" y="479227"/>
-            <a:ext cx="1377037" cy="1142226"/>
+            <a:off x="220028" y="479227"/>
+            <a:ext cx="1360170" cy="1142226"/>
           </a:xfrm>
         </p:spPr>
         <p:txBody>
@@ -2306,8 +2306,8 @@
         </p:nvSpPr>
         <p:spPr>
           <a:xfrm>
-            <a:off x="1640295" y="479227"/>
-            <a:ext cx="1377037" cy="1142226"/>
+            <a:off x="1620203" y="479227"/>
+            <a:ext cx="1360170" cy="1142226"/>
           </a:xfrm>
         </p:spPr>
         <p:txBody>
@@ -2368,7 +2368,7 @@
           <a:p>
             <a:fld id="{149F34B4-7175-41BD-B98B-2E7021201D7D}" type="datetimeFigureOut">
               <a:rPr lang="ko-KR" altLang="en-US" smtClean="0"/>
-              <a:t>2026-03-08</a:t>
+              <a:t>2026-04-09</a:t>
             </a:fld>
             <a:endParaRPr lang="ko-KR" altLang="en-US"/>
           </a:p>
@@ -2419,7 +2419,7 @@
     </p:spTree>
     <p:extLst>
       <p:ext uri="{BB962C8B-B14F-4D97-AF65-F5344CB8AC3E}">
-        <p14:creationId xmlns:p14="http://schemas.microsoft.com/office/powerpoint/2010/main" val="3465910369"/>
+        <p14:creationId xmlns:p14="http://schemas.microsoft.com/office/powerpoint/2010/main" val="3753853296"/>
       </p:ext>
     </p:extLst>
   </p:cSld>
@@ -2458,8 +2458,8 @@
         </p:nvSpPr>
         <p:spPr>
           <a:xfrm>
-            <a:off x="223178" y="95846"/>
-            <a:ext cx="2794576" cy="347960"/>
+            <a:off x="220444" y="95846"/>
+            <a:ext cx="2760345" cy="347960"/>
           </a:xfrm>
         </p:spPr>
         <p:txBody>
@@ -2486,8 +2486,8 @@
         </p:nvSpPr>
         <p:spPr>
           <a:xfrm>
-            <a:off x="223178" y="441305"/>
-            <a:ext cx="1370709" cy="216277"/>
+            <a:off x="220445" y="441305"/>
+            <a:ext cx="1353919" cy="216277"/>
           </a:xfrm>
         </p:spPr>
         <p:txBody>
@@ -2551,8 +2551,8 @@
         </p:nvSpPr>
         <p:spPr>
           <a:xfrm>
-            <a:off x="223178" y="657582"/>
-            <a:ext cx="1370709" cy="967204"/>
+            <a:off x="220445" y="657582"/>
+            <a:ext cx="1353919" cy="967204"/>
           </a:xfrm>
         </p:spPr>
         <p:txBody>
@@ -2608,8 +2608,8 @@
         </p:nvSpPr>
         <p:spPr>
           <a:xfrm>
-            <a:off x="1640295" y="441305"/>
-            <a:ext cx="1377459" cy="216277"/>
+            <a:off x="1620202" y="441305"/>
+            <a:ext cx="1360587" cy="216277"/>
           </a:xfrm>
         </p:spPr>
         <p:txBody>
@@ -2673,8 +2673,8 @@
         </p:nvSpPr>
         <p:spPr>
           <a:xfrm>
-            <a:off x="1640295" y="657582"/>
-            <a:ext cx="1377459" cy="967204"/>
+            <a:off x="1620202" y="657582"/>
+            <a:ext cx="1360587" cy="967204"/>
           </a:xfrm>
         </p:spPr>
         <p:txBody>
@@ -2735,7 +2735,7 @@
           <a:p>
             <a:fld id="{149F34B4-7175-41BD-B98B-2E7021201D7D}" type="datetimeFigureOut">
               <a:rPr lang="ko-KR" altLang="en-US" smtClean="0"/>
-              <a:t>2026-03-08</a:t>
+              <a:t>2026-04-09</a:t>
             </a:fld>
             <a:endParaRPr lang="ko-KR" altLang="en-US"/>
           </a:p>
@@ -2786,7 +2786,7 @@
     </p:spTree>
     <p:extLst>
       <p:ext uri="{BB962C8B-B14F-4D97-AF65-F5344CB8AC3E}">
-        <p14:creationId xmlns:p14="http://schemas.microsoft.com/office/powerpoint/2010/main" val="4164050254"/>
+        <p14:creationId xmlns:p14="http://schemas.microsoft.com/office/powerpoint/2010/main" val="254215852"/>
       </p:ext>
     </p:extLst>
   </p:cSld>
@@ -2853,7 +2853,7 @@
           <a:p>
             <a:fld id="{149F34B4-7175-41BD-B98B-2E7021201D7D}" type="datetimeFigureOut">
               <a:rPr lang="ko-KR" altLang="en-US" smtClean="0"/>
-              <a:t>2026-03-08</a:t>
+              <a:t>2026-04-09</a:t>
             </a:fld>
             <a:endParaRPr lang="ko-KR" altLang="en-US"/>
           </a:p>
@@ -2904,7 +2904,7 @@
     </p:spTree>
     <p:extLst>
       <p:ext uri="{BB962C8B-B14F-4D97-AF65-F5344CB8AC3E}">
-        <p14:creationId xmlns:p14="http://schemas.microsoft.com/office/powerpoint/2010/main" val="2126343418"/>
+        <p14:creationId xmlns:p14="http://schemas.microsoft.com/office/powerpoint/2010/main" val="2260937313"/>
       </p:ext>
     </p:extLst>
   </p:cSld>
@@ -2948,7 +2948,7 @@
           <a:p>
             <a:fld id="{149F34B4-7175-41BD-B98B-2E7021201D7D}" type="datetimeFigureOut">
               <a:rPr lang="ko-KR" altLang="en-US" smtClean="0"/>
-              <a:t>2026-03-08</a:t>
+              <a:t>2026-04-09</a:t>
             </a:fld>
             <a:endParaRPr lang="ko-KR" altLang="en-US"/>
           </a:p>
@@ -2999,7 +2999,7 @@
     </p:spTree>
     <p:extLst>
       <p:ext uri="{BB962C8B-B14F-4D97-AF65-F5344CB8AC3E}">
-        <p14:creationId xmlns:p14="http://schemas.microsoft.com/office/powerpoint/2010/main" val="2295738396"/>
+        <p14:creationId xmlns:p14="http://schemas.microsoft.com/office/powerpoint/2010/main" val="2440569028"/>
       </p:ext>
     </p:extLst>
   </p:cSld>
@@ -3038,8 +3038,8 @@
         </p:nvSpPr>
         <p:spPr>
           <a:xfrm>
-            <a:off x="223178" y="120015"/>
-            <a:ext cx="1045013" cy="420053"/>
+            <a:off x="220445" y="120015"/>
+            <a:ext cx="1032212" cy="420053"/>
           </a:xfrm>
         </p:spPr>
         <p:txBody>
@@ -3070,8 +3070,8 @@
         </p:nvSpPr>
         <p:spPr>
           <a:xfrm>
-            <a:off x="1377459" y="259199"/>
-            <a:ext cx="1640295" cy="1279327"/>
+            <a:off x="1360587" y="259199"/>
+            <a:ext cx="1620203" cy="1279327"/>
           </a:xfrm>
         </p:spPr>
         <p:txBody>
@@ -3155,8 +3155,8 @@
         </p:nvSpPr>
         <p:spPr>
           <a:xfrm>
-            <a:off x="223178" y="540067"/>
-            <a:ext cx="1045013" cy="1000542"/>
+            <a:off x="220445" y="540067"/>
+            <a:ext cx="1032212" cy="1000542"/>
           </a:xfrm>
         </p:spPr>
         <p:txBody>
@@ -3225,7 +3225,7 @@
           <a:p>
             <a:fld id="{149F34B4-7175-41BD-B98B-2E7021201D7D}" type="datetimeFigureOut">
               <a:rPr lang="ko-KR" altLang="en-US" smtClean="0"/>
-              <a:t>2026-03-08</a:t>
+              <a:t>2026-04-09</a:t>
             </a:fld>
             <a:endParaRPr lang="ko-KR" altLang="en-US"/>
           </a:p>
@@ -3276,7 +3276,7 @@
     </p:spTree>
     <p:extLst>
       <p:ext uri="{BB962C8B-B14F-4D97-AF65-F5344CB8AC3E}">
-        <p14:creationId xmlns:p14="http://schemas.microsoft.com/office/powerpoint/2010/main" val="2035658595"/>
+        <p14:creationId xmlns:p14="http://schemas.microsoft.com/office/powerpoint/2010/main" val="3709728218"/>
       </p:ext>
     </p:extLst>
   </p:cSld>
@@ -3315,8 +3315,8 @@
         </p:nvSpPr>
         <p:spPr>
           <a:xfrm>
-            <a:off x="223178" y="120015"/>
-            <a:ext cx="1045013" cy="420053"/>
+            <a:off x="220445" y="120015"/>
+            <a:ext cx="1032212" cy="420053"/>
           </a:xfrm>
         </p:spPr>
         <p:txBody>
@@ -3347,8 +3347,8 @@
         </p:nvSpPr>
         <p:spPr>
           <a:xfrm>
-            <a:off x="1377459" y="259199"/>
-            <a:ext cx="1640295" cy="1279327"/>
+            <a:off x="1360587" y="259199"/>
+            <a:ext cx="1620203" cy="1279327"/>
           </a:xfrm>
         </p:spPr>
         <p:txBody>
@@ -3412,8 +3412,8 @@
         </p:nvSpPr>
         <p:spPr>
           <a:xfrm>
-            <a:off x="223178" y="540067"/>
-            <a:ext cx="1045013" cy="1000542"/>
+            <a:off x="220445" y="540067"/>
+            <a:ext cx="1032212" cy="1000542"/>
           </a:xfrm>
         </p:spPr>
         <p:txBody>
@@ -3482,7 +3482,7 @@
           <a:p>
             <a:fld id="{149F34B4-7175-41BD-B98B-2E7021201D7D}" type="datetimeFigureOut">
               <a:rPr lang="ko-KR" altLang="en-US" smtClean="0"/>
-              <a:t>2026-03-08</a:t>
+              <a:t>2026-04-09</a:t>
             </a:fld>
             <a:endParaRPr lang="ko-KR" altLang="en-US"/>
           </a:p>
@@ -3533,7 +3533,7 @@
     </p:spTree>
     <p:extLst>
       <p:ext uri="{BB962C8B-B14F-4D97-AF65-F5344CB8AC3E}">
-        <p14:creationId xmlns:p14="http://schemas.microsoft.com/office/powerpoint/2010/main" val="1745249668"/>
+        <p14:creationId xmlns:p14="http://schemas.microsoft.com/office/powerpoint/2010/main" val="3808049213"/>
       </p:ext>
     </p:extLst>
   </p:cSld>
@@ -3577,8 +3577,8 @@
         </p:nvSpPr>
         <p:spPr>
           <a:xfrm>
-            <a:off x="222756" y="95846"/>
-            <a:ext cx="2794576" cy="347960"/>
+            <a:off x="220028" y="95846"/>
+            <a:ext cx="2760345" cy="347960"/>
           </a:xfrm>
           <a:prstGeom prst="rect">
             <a:avLst/>
@@ -3610,8 +3610,8 @@
         </p:nvSpPr>
         <p:spPr>
           <a:xfrm>
-            <a:off x="222756" y="479227"/>
-            <a:ext cx="2794576" cy="1142226"/>
+            <a:off x="220028" y="479227"/>
+            <a:ext cx="2760345" cy="1142226"/>
           </a:xfrm>
           <a:prstGeom prst="rect">
             <a:avLst/>
@@ -3672,8 +3672,8 @@
         </p:nvSpPr>
         <p:spPr>
           <a:xfrm>
-            <a:off x="222756" y="1668542"/>
-            <a:ext cx="729020" cy="95845"/>
+            <a:off x="220028" y="1668542"/>
+            <a:ext cx="720090" cy="95845"/>
           </a:xfrm>
           <a:prstGeom prst="rect">
             <a:avLst/>
@@ -3695,7 +3695,7 @@
           <a:p>
             <a:fld id="{149F34B4-7175-41BD-B98B-2E7021201D7D}" type="datetimeFigureOut">
               <a:rPr lang="ko-KR" altLang="en-US" smtClean="0"/>
-              <a:t>2026-03-08</a:t>
+              <a:t>2026-04-09</a:t>
             </a:fld>
             <a:endParaRPr lang="ko-KR" altLang="en-US"/>
           </a:p>
@@ -3713,8 +3713,8 @@
         </p:nvSpPr>
         <p:spPr>
           <a:xfrm>
-            <a:off x="1073279" y="1668542"/>
-            <a:ext cx="1093530" cy="95845"/>
+            <a:off x="1060133" y="1668542"/>
+            <a:ext cx="1080135" cy="95845"/>
           </a:xfrm>
           <a:prstGeom prst="rect">
             <a:avLst/>
@@ -3750,8 +3750,8 @@
         </p:nvSpPr>
         <p:spPr>
           <a:xfrm>
-            <a:off x="2288312" y="1668542"/>
-            <a:ext cx="729020" cy="95845"/>
+            <a:off x="2260283" y="1668542"/>
+            <a:ext cx="720090" cy="95845"/>
           </a:xfrm>
           <a:prstGeom prst="rect">
             <a:avLst/>
@@ -3782,24 +3782,24 @@
     </p:spTree>
     <p:extLst>
       <p:ext uri="{BB962C8B-B14F-4D97-AF65-F5344CB8AC3E}">
-        <p14:creationId xmlns:p14="http://schemas.microsoft.com/office/powerpoint/2010/main" val="4252659477"/>
+        <p14:creationId xmlns:p14="http://schemas.microsoft.com/office/powerpoint/2010/main" val="2951005502"/>
       </p:ext>
     </p:extLst>
   </p:cSld>
   <p:clrMap bg1="lt1" tx1="dk1" bg2="lt2" tx2="dk2" accent1="accent1" accent2="accent2" accent3="accent3" accent4="accent4" accent5="accent5" accent6="accent6" hlink="hlink" folHlink="folHlink"/>
   <p:sldLayoutIdLst>
-    <p:sldLayoutId id="2147483871" r:id="rId1"/>
-    <p:sldLayoutId id="2147483872" r:id="rId2"/>
-    <p:sldLayoutId id="2147483873" r:id="rId3"/>
-    <p:sldLayoutId id="2147483874" r:id="rId4"/>
-    <p:sldLayoutId id="2147483875" r:id="rId5"/>
-    <p:sldLayoutId id="2147483876" r:id="rId6"/>
-    <p:sldLayoutId id="2147483877" r:id="rId7"/>
-    <p:sldLayoutId id="2147483878" r:id="rId8"/>
-    <p:sldLayoutId id="2147483879" r:id="rId9"/>
-    <p:sldLayoutId id="2147483880" r:id="rId10"/>
-    <p:sldLayoutId id="2147483881" r:id="rId11"/>
-    <p:sldLayoutId id="2147483882" r:id="rId12"/>
+    <p:sldLayoutId id="2147483884" r:id="rId1"/>
+    <p:sldLayoutId id="2147483885" r:id="rId2"/>
+    <p:sldLayoutId id="2147483886" r:id="rId3"/>
+    <p:sldLayoutId id="2147483887" r:id="rId4"/>
+    <p:sldLayoutId id="2147483888" r:id="rId5"/>
+    <p:sldLayoutId id="2147483889" r:id="rId6"/>
+    <p:sldLayoutId id="2147483890" r:id="rId7"/>
+    <p:sldLayoutId id="2147483891" r:id="rId8"/>
+    <p:sldLayoutId id="2147483892" r:id="rId9"/>
+    <p:sldLayoutId id="2147483893" r:id="rId10"/>
+    <p:sldLayoutId id="2147483894" r:id="rId11"/>
+    <p:sldLayoutId id="2147483895" r:id="rId12"/>
     <p:sldLayoutId id="2147483790" r:id="rId13"/>
     <p:sldLayoutId id="2147483789" r:id="rId14"/>
   </p:sldLayoutIdLst>
@@ -4091,7 +4091,7 @@
             <a:srgbClr val="F26B43"/>
           </p15:clr>
         </p15:guide>
-        <p15:guide id="2" pos="1021" userDrawn="1">
+        <p15:guide id="2" pos="1008" userDrawn="1">
           <p15:clr>
             <a:srgbClr val="F26B43"/>
           </p15:clr>
@@ -4139,7 +4139,7 @@
         </p:nvSpPr>
         <p:spPr>
           <a:xfrm>
-            <a:off x="47760" y="54245"/>
+            <a:off x="27916" y="54246"/>
             <a:ext cx="1208408" cy="169277"/>
           </a:xfrm>
           <a:prstGeom prst="rect">
@@ -4192,7 +4192,7 @@
         </p:nvSpPr>
         <p:spPr>
           <a:xfrm>
-            <a:off x="94186" y="156738"/>
+            <a:off x="74342" y="156738"/>
             <a:ext cx="1508746" cy="230832"/>
           </a:xfrm>
           <a:prstGeom prst="rect">
@@ -4237,7 +4237,7 @@
         </p:nvSpPr>
         <p:spPr>
           <a:xfrm>
-            <a:off x="111579" y="351401"/>
+            <a:off x="91735" y="351401"/>
             <a:ext cx="2982706" cy="1261884"/>
           </a:xfrm>
           <a:prstGeom prst="rect">
@@ -4574,7 +4574,7 @@
         </p:nvSpPr>
         <p:spPr>
           <a:xfrm>
-            <a:off x="47760" y="54245"/>
+            <a:off x="27916" y="54246"/>
             <a:ext cx="1208408" cy="169277"/>
           </a:xfrm>
           <a:prstGeom prst="rect">
@@ -4627,7 +4627,7 @@
         </p:nvSpPr>
         <p:spPr>
           <a:xfrm>
-            <a:off x="94186" y="156738"/>
+            <a:off x="74342" y="156738"/>
             <a:ext cx="1508746" cy="230832"/>
           </a:xfrm>
           <a:prstGeom prst="rect">
@@ -4672,7 +4672,7 @@
         </p:nvSpPr>
         <p:spPr>
           <a:xfrm>
-            <a:off x="111579" y="351401"/>
+            <a:off x="91735" y="351401"/>
             <a:ext cx="2982706" cy="1261884"/>
           </a:xfrm>
           <a:prstGeom prst="rect">
@@ -5009,7 +5009,7 @@
         </p:nvSpPr>
         <p:spPr>
           <a:xfrm>
-            <a:off x="47760" y="54245"/>
+            <a:off x="27916" y="54246"/>
             <a:ext cx="1208408" cy="169277"/>
           </a:xfrm>
           <a:prstGeom prst="rect">
@@ -5062,7 +5062,7 @@
         </p:nvSpPr>
         <p:spPr>
           <a:xfrm>
-            <a:off x="94186" y="156738"/>
+            <a:off x="74342" y="156738"/>
             <a:ext cx="1508746" cy="230832"/>
           </a:xfrm>
           <a:prstGeom prst="rect">
@@ -5107,7 +5107,7 @@
         </p:nvSpPr>
         <p:spPr>
           <a:xfrm>
-            <a:off x="111579" y="351401"/>
+            <a:off x="91735" y="351401"/>
             <a:ext cx="2982706" cy="1261884"/>
           </a:xfrm>
           <a:prstGeom prst="rect">
@@ -5444,7 +5444,7 @@
         </p:nvSpPr>
         <p:spPr>
           <a:xfrm>
-            <a:off x="47760" y="54245"/>
+            <a:off x="27916" y="54246"/>
             <a:ext cx="1208408" cy="169277"/>
           </a:xfrm>
           <a:prstGeom prst="rect">
@@ -5497,7 +5497,7 @@
         </p:nvSpPr>
         <p:spPr>
           <a:xfrm>
-            <a:off x="94186" y="156738"/>
+            <a:off x="74342" y="156738"/>
             <a:ext cx="1508746" cy="230832"/>
           </a:xfrm>
           <a:prstGeom prst="rect">
@@ -5542,7 +5542,7 @@
         </p:nvSpPr>
         <p:spPr>
           <a:xfrm>
-            <a:off x="111579" y="351401"/>
+            <a:off x="91735" y="351401"/>
             <a:ext cx="2982706" cy="1261884"/>
           </a:xfrm>
           <a:prstGeom prst="rect">
@@ -5879,7 +5879,7 @@
         </p:nvSpPr>
         <p:spPr>
           <a:xfrm>
-            <a:off x="47760" y="54245"/>
+            <a:off x="27916" y="54246"/>
             <a:ext cx="1208408" cy="169277"/>
           </a:xfrm>
           <a:prstGeom prst="rect">
@@ -5932,7 +5932,7 @@
         </p:nvSpPr>
         <p:spPr>
           <a:xfrm>
-            <a:off x="94186" y="156738"/>
+            <a:off x="74342" y="156738"/>
             <a:ext cx="1508746" cy="230832"/>
           </a:xfrm>
           <a:prstGeom prst="rect">
@@ -5977,7 +5977,7 @@
         </p:nvSpPr>
         <p:spPr>
           <a:xfrm>
-            <a:off x="111579" y="351401"/>
+            <a:off x="91735" y="351401"/>
             <a:ext cx="2982706" cy="1261884"/>
           </a:xfrm>
           <a:prstGeom prst="rect">
@@ -6314,7 +6314,7 @@
         </p:nvSpPr>
         <p:spPr>
           <a:xfrm>
-            <a:off x="47760" y="54245"/>
+            <a:off x="27916" y="54246"/>
             <a:ext cx="1208408" cy="169277"/>
           </a:xfrm>
           <a:prstGeom prst="rect">
@@ -6367,7 +6367,7 @@
         </p:nvSpPr>
         <p:spPr>
           <a:xfrm>
-            <a:off x="94186" y="156738"/>
+            <a:off x="74342" y="156738"/>
             <a:ext cx="1508746" cy="230832"/>
           </a:xfrm>
           <a:prstGeom prst="rect">
@@ -6412,7 +6412,7 @@
         </p:nvSpPr>
         <p:spPr>
           <a:xfrm>
-            <a:off x="111579" y="351401"/>
+            <a:off x="91735" y="351401"/>
             <a:ext cx="2982706" cy="1261884"/>
           </a:xfrm>
           <a:prstGeom prst="rect">
